--- a/docs/Zycus_Redlining_Agent_Deck.pptx
+++ b/docs/Zycus_Redlining_Agent_Deck.pptx
@@ -5234,7 +5234,7 @@
                 </a:solidFill>
                 <a:latin typeface="Consolas"/>
               </a:rPr>
-              <a:t>04   WHAT BROKE</a:t>
+              <a:t>04   WHERE THE AI GOT IT WRONG</a:t>
             </a:r>
           </a:p>
         </p:txBody>
@@ -5273,7 +5273,7 @@
                 </a:solidFill>
                 <a:latin typeface="Georgia"/>
               </a:rPr>
-              <a:t>Two bugs the tests were happy with</a:t>
+              <a:t>Two bugs Claude wrote, and its own tests passed</a:t>
             </a:r>
           </a:p>
         </p:txBody>
@@ -5312,7 +5312,7 @@
                 </a:solidFill>
                 <a:latin typeface="Segoe UI"/>
               </a:rPr>
-              <a:t>Both were found by reading the output, not by a crash. Neither would have been caught by asking “does it return findings?”</a:t>
+              <a:t>Every module here was AI-generated. Both bugs survived review and a green test suite, and were caught only by reading the product output against the sample contract.</a:t>
             </a:r>
           </a:p>
         </p:txBody>
@@ -5351,7 +5351,7 @@
                 </a:solidFill>
                 <a:latin typeface="Consolas"/>
               </a:rPr>
-              <a:t>BUG 1  ·  SILENT DATA LOSS</a:t>
+              <a:t>BUG 1  ·  CORRECT IN EACH PART, WRONG AS A WHOLE</a:t>
             </a:r>
           </a:p>
         </p:txBody>
@@ -5430,7 +5430,7 @@
                 </a:solidFill>
                 <a:latin typeface="Segoe UI"/>
               </a:rPr>
-              <a:t>Clause 1 breaches two rules at once. Drafting ran per clause-rule pair, so each replacement rewrote the whole clause and kept the other breach:</a:t>
+              <a:t>Clause 1 breaches two rules at once. Claude drafted per clause-rule pair, which reads sensibly one function at a time, and kept the other breach each time:</a:t>
             </a:r>
           </a:p>
         </p:txBody>
@@ -5793,7 +5793,7 @@
                 </a:solidFill>
                 <a:latin typeface="Segoe UI"/>
               </a:rPr>
-              <a:t>Paste either one and you fix a violation while shipping the other. Every unit test passed throughout, because each redline was individually correct.</a:t>
+              <a:t>Paste either one and you fix a violation while shipping the other. Every test passed: the bug lives only in the relationship between two findings.</a:t>
             </a:r>
           </a:p>
         </p:txBody>
@@ -5994,7 +5994,7 @@
                 </a:solidFill>
                 <a:latin typeface="Consolas"/>
               </a:rPr>
-              <a:t>BUG 2  ·  A FEATURE THAT NEVER FIRED</a:t>
+              <a:t>BUG 2  ·  RIGHT CODE, WRONG ASSUMPTION</a:t>
             </a:r>
           </a:p>
         </p:txBody>
@@ -6073,7 +6073,7 @@
                 </a:solidFill>
                 <a:latin typeface="Segoe UI"/>
               </a:rPr>
-              <a:t>The low-confidence branch never triggered. Against a deliberately vague draft the model reported:</a:t>
+              <a:t>Asked for confidence handling, Claude let the model score itself and thresholded on it. It never fired once. Against a deliberately vague draft:</a:t>
             </a:r>
           </a:p>
         </p:txBody>
@@ -6748,7 +6748,7 @@
                 </a:solidFill>
                 <a:latin typeface="Segoe UI"/>
               </a:rPr>
-              <a:t>Confidence sat at 0.8–0.9 however little the clause committed to. The last row is the dangerous one: a clause naming no jurisdiction at all, confidently cleared.</a:t>
+              <a:t>Confidence sat at 0.8–0.9 however little the clause committed to. The code was not buggy; the wrong assumption was about model behaviour.</a:t>
             </a:r>
           </a:p>
         </p:txBody>

--- a/docs/Zycus_Redlining_Agent_Deck.pptx
+++ b/docs/Zycus_Redlining_Agent_Deck.pptx
@@ -4670,7 +4670,7 @@
                 </a:solidFill>
                 <a:latin typeface="Segoe UI"/>
               </a:rPr>
-              <a:t>One endpoint runs a fixed pipeline. Each step is one module, so the diagram and the directory listing are the same thing.</a:t>
+              <a:t>One endpoint runs a fixed pipeline. Each step is one module, split at the top level into app/tools (deterministic) and app/agents (model-backed), so the diagram and the directory listing are the same thing.</a:t>
             </a:r>
           </a:p>
         </p:txBody>

--- a/docs/Zycus_Redlining_Agent_Deck.pptx
+++ b/docs/Zycus_Redlining_Agent_Deck.pptx
@@ -4417,8 +4417,8 @@
         </p:nvSpPr>
         <p:spPr>
           <a:xfrm>
-            <a:off x="658368" y="5010912"/>
-            <a:ext cx="10874959" cy="658368"/>
+            <a:off x="658368" y="4992624"/>
+            <a:ext cx="10874959" cy="969264"/>
           </a:xfrm>
           <a:prstGeom prst="rect">
             <a:avLst/>
@@ -4459,8 +4459,8 @@
         </p:nvSpPr>
         <p:spPr>
           <a:xfrm>
-            <a:off x="658368" y="5010912"/>
-            <a:ext cx="36576" cy="658368"/>
+            <a:off x="658368" y="4992624"/>
+            <a:ext cx="36576" cy="969264"/>
           </a:xfrm>
           <a:prstGeom prst="rect">
             <a:avLst/>
@@ -4501,8 +4501,8 @@
         </p:nvSpPr>
         <p:spPr>
           <a:xfrm>
-            <a:off x="859536" y="5148072"/>
-            <a:ext cx="10417759" cy="457200"/>
+            <a:off x="859536" y="5129784"/>
+            <a:ext cx="10417759" cy="777240"/>
           </a:xfrm>
           <a:prstGeom prst="rect">
             <a:avLst/>
@@ -4527,7 +4527,7 @@
                 </a:solidFill>
                 <a:latin typeface="Segoe UI"/>
               </a:rPr>
-              <a:t>Four of these rules turn on a number, so they can be settled by arithmetic. Three turn on what the words mean, and only those need a model. The system is built around that split.</a:t>
+              <a:t>Four of these rules turn on a number, so they can be settled by arithmetic. Three turn on what the words mean, and only those need a model. The system is built around that split, and it survives swapping the playbook: rules load as structured data carrying their own thresholds and anchor phrases, so a customer's own rules still reach the verified tier.</a:t>
             </a:r>
           </a:p>
         </p:txBody>
@@ -5010,7 +5010,7 @@
       </p:sp>
       <p:pic>
         <p:nvPicPr>
-          <p:cNvPr id="5" name="Picture 4" descr="shot-summary.png"/>
+          <p:cNvPr id="5" name="Picture 4" descr="new-shell.png"/>
           <p:cNvPicPr>
             <a:picLocks noChangeAspect="1"/>
           </p:cNvPicPr>
@@ -5024,8 +5024,8 @@
         </p:blipFill>
         <p:spPr>
           <a:xfrm>
-            <a:off x="658368" y="1920240"/>
-            <a:ext cx="10874959" cy="1633351"/>
+            <a:off x="658368" y="1847088"/>
+            <a:ext cx="7223760" cy="4526890"/>
           </a:xfrm>
           <a:prstGeom prst="rect">
             <a:avLst/>
@@ -5040,8 +5040,8 @@
         </p:nvSpPr>
         <p:spPr>
           <a:xfrm>
-            <a:off x="658368" y="3675887"/>
-            <a:ext cx="10874959" cy="201168"/>
+            <a:off x="8202168" y="1874519"/>
+            <a:ext cx="3331159" cy="228600"/>
           </a:xfrm>
           <a:prstGeom prst="rect">
             <a:avLst/>
@@ -5060,116 +5060,544 @@
               </a:lnSpc>
             </a:pPr>
             <a:r>
-              <a:rPr sz="1050" b="0" i="1">
+              <a:rPr sz="1200" b="1" i="0">
+                <a:solidFill>
+                  <a:srgbClr val="16202E"/>
+                </a:solidFill>
+                <a:latin typeface="Segoe UI"/>
+              </a:rPr>
+              <a:t>Everything in one frame</a:t>
+            </a:r>
+          </a:p>
+        </p:txBody>
+      </p:sp>
+      <p:sp>
+        <p:nvSpPr>
+          <p:cNvPr id="7" name="Rectangle 6"/>
+          <p:cNvSpPr/>
+          <p:nvPr/>
+        </p:nvSpPr>
+        <p:spPr>
+          <a:xfrm>
+            <a:off x="8202168" y="2240280"/>
+            <a:ext cx="3331159" cy="768096"/>
+          </a:xfrm>
+          <a:prstGeom prst="rect">
+            <a:avLst/>
+          </a:prstGeom>
+          <a:solidFill>
+            <a:srgbClr val="F5F7FA"/>
+          </a:solidFill>
+          <a:ln>
+            <a:noFill/>
+          </a:ln>
+          <a:effectLst/>
+        </p:spPr>
+        <p:style>
+          <a:lnRef idx="1">
+            <a:schemeClr val="accent1"/>
+          </a:lnRef>
+          <a:fillRef idx="3">
+            <a:schemeClr val="accent1"/>
+          </a:fillRef>
+          <a:effectRef idx="2">
+            <a:schemeClr val="accent1"/>
+          </a:effectRef>
+          <a:fontRef idx="minor">
+            <a:schemeClr val="lt1"/>
+          </a:fontRef>
+        </p:style>
+        <p:txBody>
+          <a:bodyPr rtlCol="0" anchor="ctr"/>
+          <a:lstStyle/>
+          <a:p/>
+        </p:txBody>
+      </p:sp>
+      <p:sp>
+        <p:nvSpPr>
+          <p:cNvPr id="8" name="Rectangle 7"/>
+          <p:cNvSpPr/>
+          <p:nvPr/>
+        </p:nvSpPr>
+        <p:spPr>
+          <a:xfrm>
+            <a:off x="8202168" y="2240280"/>
+            <a:ext cx="27432" cy="768096"/>
+          </a:xfrm>
+          <a:prstGeom prst="rect">
+            <a:avLst/>
+          </a:prstGeom>
+          <a:solidFill>
+            <a:srgbClr val="1F5FD6"/>
+          </a:solidFill>
+          <a:ln>
+            <a:noFill/>
+          </a:ln>
+          <a:effectLst/>
+        </p:spPr>
+        <p:style>
+          <a:lnRef idx="1">
+            <a:schemeClr val="accent1"/>
+          </a:lnRef>
+          <a:fillRef idx="3">
+            <a:schemeClr val="accent1"/>
+          </a:fillRef>
+          <a:effectRef idx="2">
+            <a:schemeClr val="accent1"/>
+          </a:effectRef>
+          <a:fontRef idx="minor">
+            <a:schemeClr val="lt1"/>
+          </a:fontRef>
+        </p:style>
+        <p:txBody>
+          <a:bodyPr rtlCol="0" anchor="ctr"/>
+          <a:lstStyle/>
+          <a:p/>
+        </p:txBody>
+      </p:sp>
+      <p:sp>
+        <p:nvSpPr>
+          <p:cNvPr id="9" name="TextBox 8"/>
+          <p:cNvSpPr txBox="1"/>
+          <p:nvPr/>
+        </p:nvSpPr>
+        <p:spPr>
+          <a:xfrm>
+            <a:off x="8348472" y="2359152"/>
+            <a:ext cx="3038551" cy="566928"/>
+          </a:xfrm>
+          <a:prstGeom prst="rect">
+            <a:avLst/>
+          </a:prstGeom>
+          <a:noFill/>
+        </p:spPr>
+        <p:txBody>
+          <a:bodyPr wrap="square" lIns="0" rIns="0" tIns="0" bIns="0">
+            <a:spAutoFit/>
+          </a:bodyPr>
+          <a:lstStyle/>
+          <a:p>
+            <a:pPr algn="l">
+              <a:lnSpc>
+                <a:spcPct val="125000"/>
+              </a:lnSpc>
+            </a:pPr>
+            <a:r>
+              <a:rPr sz="1050" b="0" i="0">
+                <a:solidFill>
+                  <a:srgbClr val="4A5668"/>
+                </a:solidFill>
+                <a:latin typeface="Segoe UI"/>
+              </a:rPr>
+              <a:t>A real PDF read into the editor, shown before any model call is spent on it.</a:t>
+            </a:r>
+          </a:p>
+        </p:txBody>
+      </p:sp>
+      <p:sp>
+        <p:nvSpPr>
+          <p:cNvPr id="10" name="Rectangle 9"/>
+          <p:cNvSpPr/>
+          <p:nvPr/>
+        </p:nvSpPr>
+        <p:spPr>
+          <a:xfrm>
+            <a:off x="8202168" y="3108960"/>
+            <a:ext cx="3331159" cy="768096"/>
+          </a:xfrm>
+          <a:prstGeom prst="rect">
+            <a:avLst/>
+          </a:prstGeom>
+          <a:solidFill>
+            <a:srgbClr val="F5F7FA"/>
+          </a:solidFill>
+          <a:ln>
+            <a:noFill/>
+          </a:ln>
+          <a:effectLst/>
+        </p:spPr>
+        <p:style>
+          <a:lnRef idx="1">
+            <a:schemeClr val="accent1"/>
+          </a:lnRef>
+          <a:fillRef idx="3">
+            <a:schemeClr val="accent1"/>
+          </a:fillRef>
+          <a:effectRef idx="2">
+            <a:schemeClr val="accent1"/>
+          </a:effectRef>
+          <a:fontRef idx="minor">
+            <a:schemeClr val="lt1"/>
+          </a:fontRef>
+        </p:style>
+        <p:txBody>
+          <a:bodyPr rtlCol="0" anchor="ctr"/>
+          <a:lstStyle/>
+          <a:p/>
+        </p:txBody>
+      </p:sp>
+      <p:sp>
+        <p:nvSpPr>
+          <p:cNvPr id="11" name="Rectangle 10"/>
+          <p:cNvSpPr/>
+          <p:nvPr/>
+        </p:nvSpPr>
+        <p:spPr>
+          <a:xfrm>
+            <a:off x="8202168" y="3108960"/>
+            <a:ext cx="27432" cy="768096"/>
+          </a:xfrm>
+          <a:prstGeom prst="rect">
+            <a:avLst/>
+          </a:prstGeom>
+          <a:solidFill>
+            <a:srgbClr val="1F5FD6"/>
+          </a:solidFill>
+          <a:ln>
+            <a:noFill/>
+          </a:ln>
+          <a:effectLst/>
+        </p:spPr>
+        <p:style>
+          <a:lnRef idx="1">
+            <a:schemeClr val="accent1"/>
+          </a:lnRef>
+          <a:fillRef idx="3">
+            <a:schemeClr val="accent1"/>
+          </a:fillRef>
+          <a:effectRef idx="2">
+            <a:schemeClr val="accent1"/>
+          </a:effectRef>
+          <a:fontRef idx="minor">
+            <a:schemeClr val="lt1"/>
+          </a:fontRef>
+        </p:style>
+        <p:txBody>
+          <a:bodyPr rtlCol="0" anchor="ctr"/>
+          <a:lstStyle/>
+          <a:p/>
+        </p:txBody>
+      </p:sp>
+      <p:sp>
+        <p:nvSpPr>
+          <p:cNvPr id="12" name="TextBox 11"/>
+          <p:cNvSpPr txBox="1"/>
+          <p:nvPr/>
+        </p:nvSpPr>
+        <p:spPr>
+          <a:xfrm>
+            <a:off x="8348472" y="3227832"/>
+            <a:ext cx="3038551" cy="566928"/>
+          </a:xfrm>
+          <a:prstGeom prst="rect">
+            <a:avLst/>
+          </a:prstGeom>
+          <a:noFill/>
+        </p:spPr>
+        <p:txBody>
+          <a:bodyPr wrap="square" lIns="0" rIns="0" tIns="0" bIns="0">
+            <a:spAutoFit/>
+          </a:bodyPr>
+          <a:lstStyle/>
+          <a:p>
+            <a:pPr algn="l">
+              <a:lnSpc>
+                <a:spcPct val="125000"/>
+              </a:lnSpc>
+            </a:pPr>
+            <a:r>
+              <a:rPr sz="1050" b="0" i="0">
+                <a:solidFill>
+                  <a:srgbClr val="4A5668"/>
+                </a:solidFill>
+                <a:latin typeface="Segoe UI"/>
+              </a:rPr>
+              <a:t>The playbook and the audit trail in the rail.</a:t>
+            </a:r>
+          </a:p>
+        </p:txBody>
+      </p:sp>
+      <p:sp>
+        <p:nvSpPr>
+          <p:cNvPr id="13" name="Rectangle 12"/>
+          <p:cNvSpPr/>
+          <p:nvPr/>
+        </p:nvSpPr>
+        <p:spPr>
+          <a:xfrm>
+            <a:off x="8202168" y="3977639"/>
+            <a:ext cx="3331159" cy="768096"/>
+          </a:xfrm>
+          <a:prstGeom prst="rect">
+            <a:avLst/>
+          </a:prstGeom>
+          <a:solidFill>
+            <a:srgbClr val="F5F7FA"/>
+          </a:solidFill>
+          <a:ln>
+            <a:noFill/>
+          </a:ln>
+          <a:effectLst/>
+        </p:spPr>
+        <p:style>
+          <a:lnRef idx="1">
+            <a:schemeClr val="accent1"/>
+          </a:lnRef>
+          <a:fillRef idx="3">
+            <a:schemeClr val="accent1"/>
+          </a:fillRef>
+          <a:effectRef idx="2">
+            <a:schemeClr val="accent1"/>
+          </a:effectRef>
+          <a:fontRef idx="minor">
+            <a:schemeClr val="lt1"/>
+          </a:fontRef>
+        </p:style>
+        <p:txBody>
+          <a:bodyPr rtlCol="0" anchor="ctr"/>
+          <a:lstStyle/>
+          <a:p/>
+        </p:txBody>
+      </p:sp>
+      <p:sp>
+        <p:nvSpPr>
+          <p:cNvPr id="14" name="Rectangle 13"/>
+          <p:cNvSpPr/>
+          <p:nvPr/>
+        </p:nvSpPr>
+        <p:spPr>
+          <a:xfrm>
+            <a:off x="8202168" y="3977639"/>
+            <a:ext cx="27432" cy="768096"/>
+          </a:xfrm>
+          <a:prstGeom prst="rect">
+            <a:avLst/>
+          </a:prstGeom>
+          <a:solidFill>
+            <a:srgbClr val="1F5FD6"/>
+          </a:solidFill>
+          <a:ln>
+            <a:noFill/>
+          </a:ln>
+          <a:effectLst/>
+        </p:spPr>
+        <p:style>
+          <a:lnRef idx="1">
+            <a:schemeClr val="accent1"/>
+          </a:lnRef>
+          <a:fillRef idx="3">
+            <a:schemeClr val="accent1"/>
+          </a:fillRef>
+          <a:effectRef idx="2">
+            <a:schemeClr val="accent1"/>
+          </a:effectRef>
+          <a:fontRef idx="minor">
+            <a:schemeClr val="lt1"/>
+          </a:fontRef>
+        </p:style>
+        <p:txBody>
+          <a:bodyPr rtlCol="0" anchor="ctr"/>
+          <a:lstStyle/>
+          <a:p/>
+        </p:txBody>
+      </p:sp>
+      <p:sp>
+        <p:nvSpPr>
+          <p:cNvPr id="15" name="TextBox 14"/>
+          <p:cNvSpPr txBox="1"/>
+          <p:nvPr/>
+        </p:nvSpPr>
+        <p:spPr>
+          <a:xfrm>
+            <a:off x="8348472" y="4096511"/>
+            <a:ext cx="3038551" cy="566928"/>
+          </a:xfrm>
+          <a:prstGeom prst="rect">
+            <a:avLst/>
+          </a:prstGeom>
+          <a:noFill/>
+        </p:spPr>
+        <p:txBody>
+          <a:bodyPr wrap="square" lIns="0" rIns="0" tIns="0" bIns="0">
+            <a:spAutoFit/>
+          </a:bodyPr>
+          <a:lstStyle/>
+          <a:p>
+            <a:pPr algn="l">
+              <a:lnSpc>
+                <a:spcPct val="125000"/>
+              </a:lnSpc>
+            </a:pPr>
+            <a:r>
+              <a:rPr sz="1050" b="0" i="0">
+                <a:solidFill>
+                  <a:srgbClr val="4A5668"/>
+                </a:solidFill>
+                <a:latin typeface="Segoe UI"/>
+              </a:rPr>
+              <a:t>The whole contract summarised before any scrolling.</a:t>
+            </a:r>
+          </a:p>
+        </p:txBody>
+      </p:sp>
+      <p:sp>
+        <p:nvSpPr>
+          <p:cNvPr id="16" name="Rectangle 15"/>
+          <p:cNvSpPr/>
+          <p:nvPr/>
+        </p:nvSpPr>
+        <p:spPr>
+          <a:xfrm>
+            <a:off x="8202168" y="4846320"/>
+            <a:ext cx="3331159" cy="768096"/>
+          </a:xfrm>
+          <a:prstGeom prst="rect">
+            <a:avLst/>
+          </a:prstGeom>
+          <a:solidFill>
+            <a:srgbClr val="F5F7FA"/>
+          </a:solidFill>
+          <a:ln>
+            <a:noFill/>
+          </a:ln>
+          <a:effectLst/>
+        </p:spPr>
+        <p:style>
+          <a:lnRef idx="1">
+            <a:schemeClr val="accent1"/>
+          </a:lnRef>
+          <a:fillRef idx="3">
+            <a:schemeClr val="accent1"/>
+          </a:fillRef>
+          <a:effectRef idx="2">
+            <a:schemeClr val="accent1"/>
+          </a:effectRef>
+          <a:fontRef idx="minor">
+            <a:schemeClr val="lt1"/>
+          </a:fontRef>
+        </p:style>
+        <p:txBody>
+          <a:bodyPr rtlCol="0" anchor="ctr"/>
+          <a:lstStyle/>
+          <a:p/>
+        </p:txBody>
+      </p:sp>
+      <p:sp>
+        <p:nvSpPr>
+          <p:cNvPr id="17" name="Rectangle 16"/>
+          <p:cNvSpPr/>
+          <p:nvPr/>
+        </p:nvSpPr>
+        <p:spPr>
+          <a:xfrm>
+            <a:off x="8202168" y="4846320"/>
+            <a:ext cx="27432" cy="768096"/>
+          </a:xfrm>
+          <a:prstGeom prst="rect">
+            <a:avLst/>
+          </a:prstGeom>
+          <a:solidFill>
+            <a:srgbClr val="1F5FD6"/>
+          </a:solidFill>
+          <a:ln>
+            <a:noFill/>
+          </a:ln>
+          <a:effectLst/>
+        </p:spPr>
+        <p:style>
+          <a:lnRef idx="1">
+            <a:schemeClr val="accent1"/>
+          </a:lnRef>
+          <a:fillRef idx="3">
+            <a:schemeClr val="accent1"/>
+          </a:fillRef>
+          <a:effectRef idx="2">
+            <a:schemeClr val="accent1"/>
+          </a:effectRef>
+          <a:fontRef idx="minor">
+            <a:schemeClr val="lt1"/>
+          </a:fontRef>
+        </p:style>
+        <p:txBody>
+          <a:bodyPr rtlCol="0" anchor="ctr"/>
+          <a:lstStyle/>
+          <a:p/>
+        </p:txBody>
+      </p:sp>
+      <p:sp>
+        <p:nvSpPr>
+          <p:cNvPr id="18" name="TextBox 17"/>
+          <p:cNvSpPr txBox="1"/>
+          <p:nvPr/>
+        </p:nvSpPr>
+        <p:spPr>
+          <a:xfrm>
+            <a:off x="8348472" y="4965192"/>
+            <a:ext cx="3038551" cy="566928"/>
+          </a:xfrm>
+          <a:prstGeom prst="rect">
+            <a:avLst/>
+          </a:prstGeom>
+          <a:noFill/>
+        </p:spPr>
+        <p:txBody>
+          <a:bodyPr wrap="square" lIns="0" rIns="0" tIns="0" bIns="0">
+            <a:spAutoFit/>
+          </a:bodyPr>
+          <a:lstStyle/>
+          <a:p>
+            <a:pPr algn="l">
+              <a:lnSpc>
+                <a:spcPct val="125000"/>
+              </a:lnSpc>
+            </a:pPr>
+            <a:r>
+              <a:rPr sz="1050" b="0" i="0">
+                <a:solidFill>
+                  <a:srgbClr val="4A5668"/>
+                </a:solidFill>
+                <a:latin typeface="Segoe UI"/>
+              </a:rPr>
+              <a:t>Findings filtered to what needs a human, or what to escalate.</a:t>
+            </a:r>
+          </a:p>
+        </p:txBody>
+      </p:sp>
+      <p:sp>
+        <p:nvSpPr>
+          <p:cNvPr id="19" name="TextBox 18"/>
+          <p:cNvSpPr txBox="1"/>
+          <p:nvPr/>
+        </p:nvSpPr>
+        <p:spPr>
+          <a:xfrm>
+            <a:off x="658368" y="6455664"/>
+            <a:ext cx="7223760" cy="256032"/>
+          </a:xfrm>
+          <a:prstGeom prst="rect">
+            <a:avLst/>
+          </a:prstGeom>
+          <a:noFill/>
+        </p:spPr>
+        <p:txBody>
+          <a:bodyPr wrap="square" lIns="0" rIns="0" tIns="0" bIns="0">
+            <a:spAutoFit/>
+          </a:bodyPr>
+          <a:lstStyle/>
+          <a:p>
+            <a:pPr algn="l">
+              <a:lnSpc>
+                <a:spcPct val="120000"/>
+              </a:lnSpc>
+            </a:pPr>
+            <a:r>
+              <a:rPr sz="1000" b="0" i="1">
                 <a:solidFill>
                   <a:srgbClr val="6D7888"/>
                 </a:solidFill>
                 <a:latin typeface="Segoe UI"/>
               </a:rPr>
-              <a:t>The whole contract in one line, before any scrolling.</a:t>
-            </a:r>
-          </a:p>
-        </p:txBody>
-      </p:sp>
-      <p:pic>
-        <p:nvPicPr>
-          <p:cNvPr id="7" name="Picture 6" descr="shot-verified.png"/>
-          <p:cNvPicPr>
-            <a:picLocks noChangeAspect="1"/>
-          </p:cNvPicPr>
-          <p:nvPr/>
-        </p:nvPicPr>
-        <p:blipFill>
-          <a:blip r:embed="rId3"/>
-          <a:stretch>
-            <a:fillRect/>
-          </a:stretch>
-        </p:blipFill>
-        <p:spPr>
-          <a:xfrm>
-            <a:off x="658368" y="4069080"/>
-            <a:ext cx="7315200" cy="2466753"/>
-          </a:xfrm>
-          <a:prstGeom prst="rect">
-            <a:avLst/>
-          </a:prstGeom>
-        </p:spPr>
-      </p:pic>
-      <p:sp>
-        <p:nvSpPr>
-          <p:cNvPr id="8" name="TextBox 7"/>
-          <p:cNvSpPr txBox="1"/>
-          <p:nvPr/>
-        </p:nvSpPr>
-        <p:spPr>
-          <a:xfrm>
-            <a:off x="8339328" y="4114800"/>
-            <a:ext cx="3193999" cy="228600"/>
-          </a:xfrm>
-          <a:prstGeom prst="rect">
-            <a:avLst/>
-          </a:prstGeom>
-          <a:noFill/>
-        </p:spPr>
-        <p:txBody>
-          <a:bodyPr wrap="square" lIns="0" rIns="0" tIns="0" bIns="0">
-            <a:spAutoFit/>
-          </a:bodyPr>
-          <a:lstStyle/>
-          <a:p>
-            <a:pPr algn="l">
-              <a:lnSpc>
-                <a:spcPct val="120000"/>
-              </a:lnSpc>
-            </a:pPr>
-            <a:r>
-              <a:rPr sz="1200" b="1" i="0">
-                <a:solidFill>
-                  <a:srgbClr val="16202E"/>
-                </a:solidFill>
-                <a:latin typeface="Segoe UI"/>
-              </a:rPr>
-              <a:t>One finding, end to end</a:t>
-            </a:r>
-          </a:p>
-        </p:txBody>
-      </p:sp>
-      <p:sp>
-        <p:nvSpPr>
-          <p:cNvPr id="9" name="TextBox 8"/>
-          <p:cNvSpPr txBox="1"/>
-          <p:nvPr/>
-        </p:nvSpPr>
-        <p:spPr>
-          <a:xfrm>
-            <a:off x="8339328" y="4434840"/>
-            <a:ext cx="3193999" cy="1828800"/>
-          </a:xfrm>
-          <a:prstGeom prst="rect">
-            <a:avLst/>
-          </a:prstGeom>
-          <a:noFill/>
-        </p:spPr>
-        <p:txBody>
-          <a:bodyPr wrap="square" lIns="0" rIns="0" tIns="0" bIns="0">
-            <a:spAutoFit/>
-          </a:bodyPr>
-          <a:lstStyle/>
-          <a:p>
-            <a:pPr algn="l">
-              <a:lnSpc>
-                <a:spcPct val="130000"/>
-              </a:lnSpc>
-            </a:pPr>
-            <a:r>
-              <a:rPr sz="1100" b="0" i="0">
-                <a:solidFill>
-                  <a:srgbClr val="4A5668"/>
-                </a:solidFill>
-                <a:latin typeface="Segoe UI"/>
-              </a:rPr>
-              <a:t>Net 15 against a Net 30 floor.
-The verdict line is arithmetic rather than a model opinion, the quoted wording shows where it came from, and the replacement sits beside the vendor's original.</a:t>
+              <a:t>Upload, playbook, audit trail and results on one screen, in light or dark.</a:t>
             </a:r>
           </a:p>
         </p:txBody>
@@ -7795,7 +8223,7 @@
       </p:sp>
       <p:pic>
         <p:nvPicPr>
-          <p:cNvPr id="23" name="Picture 22" descr="shot-flagged.png"/>
+          <p:cNvPr id="23" name="Picture 22" descr="new-flagged.png"/>
           <p:cNvPicPr>
             <a:picLocks noChangeAspect="1"/>
           </p:cNvPicPr>
@@ -7810,7 +8238,7 @@
         <p:spPr>
           <a:xfrm>
             <a:off x="658368" y="3858768"/>
-            <a:ext cx="5989320" cy="1491526"/>
+            <a:ext cx="5989320" cy="1682999"/>
           </a:xfrm>
           <a:prstGeom prst="rect">
             <a:avLst/>
@@ -7825,8 +8253,8 @@
         </p:nvSpPr>
         <p:spPr>
           <a:xfrm>
-            <a:off x="658368" y="5440680"/>
-            <a:ext cx="5989320" cy="274320"/>
+            <a:off x="658368" y="5650992"/>
+            <a:ext cx="5989320" cy="365760"/>
           </a:xfrm>
           <a:prstGeom prst="rect">
             <a:avLst/>
@@ -8642,7 +9070,7 @@
                 </a:solidFill>
                 <a:latin typeface="Georgia"/>
               </a:rPr>
-              <a:t>86</a:t>
+              <a:t>132</a:t>
             </a:r>
           </a:p>
         </p:txBody>
@@ -8681,7 +9109,7 @@
                 </a:solidFill>
                 <a:latin typeface="Segoe UI"/>
               </a:rPr>
-              <a:t>tests, 66 needing no API key</a:t>
+              <a:t>tests, 96 needing no API key</a:t>
             </a:r>
           </a:p>
         </p:txBody>
